--- a/Training Materials/12. Design Patterns in Java/Slides/4. Getting to Know the Behavioral Design Patterns/getting-to-know-the-behavioral-design-patterns-slides.pptx
+++ b/Training Materials/12. Design Patterns in Java/Slides/4. Getting to Know the Behavioral Design Patterns/getting-to-know-the-behavioral-design-patterns-slides.pptx
@@ -170,7 +170,7 @@
           <a:p>
             <a:fld id="{7DB2517D-3BEF-41BF-A8BC-FA333B9EBCFA}" type="datetimeFigureOut">
               <a:rPr lang="en-IN" smtClean="0"/>
-              <a:t>18-09-2024</a:t>
+              <a:t>22-10-2025</a:t>
             </a:fld>
             <a:endParaRPr lang="en-IN"/>
           </a:p>
@@ -583,7 +583,7 @@
           <a:p>
             <a:fld id="{3251F19E-1388-479A-B37E-07198EAD6DFE}" type="datetime1">
               <a:rPr lang="en-US" smtClean="0"/>
-              <a:t>9/18/2024</a:t>
+              <a:t>10/22/2025</a:t>
             </a:fld>
             <a:endParaRPr lang="en-US"/>
           </a:p>
@@ -754,7 +754,7 @@
           <a:p>
             <a:fld id="{49E821D5-F6D8-4A9D-84E4-1602DB8EE87A}" type="datetime1">
               <a:rPr lang="en-US" smtClean="0"/>
-              <a:t>9/18/2024</a:t>
+              <a:t>10/22/2025</a:t>
             </a:fld>
             <a:endParaRPr lang="en-US"/>
           </a:p>
@@ -968,7 +968,7 @@
           <a:p>
             <a:fld id="{FFC59B1C-3382-4347-B28F-C13C482233B7}" type="datetime1">
               <a:rPr lang="en-US" smtClean="0"/>
-              <a:t>9/18/2024</a:t>
+              <a:t>10/22/2025</a:t>
             </a:fld>
             <a:endParaRPr lang="en-US"/>
           </a:p>
@@ -1116,7 +1116,7 @@
           <a:p>
             <a:fld id="{0825354A-A03E-4A54-8332-7AD13301C09C}" type="datetime1">
               <a:rPr lang="en-US" smtClean="0"/>
-              <a:t>9/18/2024</a:t>
+              <a:t>10/22/2025</a:t>
             </a:fld>
             <a:endParaRPr lang="en-US"/>
           </a:p>
@@ -1235,7 +1235,7 @@
           <a:p>
             <a:fld id="{7E7A09B9-EEDB-4B61-904F-FDD37BF4AEEF}" type="datetime1">
               <a:rPr lang="en-US" smtClean="0"/>
-              <a:t>9/18/2024</a:t>
+              <a:t>10/22/2025</a:t>
             </a:fld>
             <a:endParaRPr lang="en-US"/>
           </a:p>
@@ -1454,7 +1454,7 @@
           <a:p>
             <a:fld id="{7D06AB22-EB73-4FE2-B1C3-C59E2A9B63D2}" type="datetime1">
               <a:rPr lang="en-US" smtClean="0"/>
-              <a:t>9/18/2024</a:t>
+              <a:t>10/22/2025</a:t>
             </a:fld>
             <a:endParaRPr lang="en-US"/>
           </a:p>
@@ -26291,7 +26291,7 @@
               </a:rPr>
               <a:t> {</a:t>
             </a:r>
-            <a:endParaRPr sz="2000">
+            <a:endParaRPr sz="2000" dirty="0">
               <a:latin typeface="Courier New"/>
               <a:cs typeface="Courier New"/>
             </a:endParaRPr>
@@ -26333,7 +26333,27 @@
                 <a:latin typeface="Courier New"/>
                 <a:cs typeface="Courier New"/>
               </a:rPr>
-              <a:t>Fist</a:t>
+              <a:t>Fi</a:t>
+            </a:r>
+            <a:r>
+              <a:rPr lang="en-IN" sz="2000" dirty="0">
+                <a:solidFill>
+                  <a:srgbClr val="A6A6A6"/>
+                </a:solidFill>
+                <a:latin typeface="Courier New"/>
+                <a:cs typeface="Courier New"/>
+              </a:rPr>
+              <a:t>r</a:t>
+            </a:r>
+            <a:r>
+              <a:rPr sz="2000" dirty="0" err="1">
+                <a:solidFill>
+                  <a:srgbClr val="A6A6A6"/>
+                </a:solidFill>
+                <a:latin typeface="Courier New"/>
+                <a:cs typeface="Courier New"/>
+              </a:rPr>
+              <a:t>st</a:t>
             </a:r>
             <a:r>
               <a:rPr sz="2000" spc="-15" dirty="0">
@@ -26355,7 +26375,7 @@
               </a:rPr>
               <a:t>statement/step</a:t>
             </a:r>
-            <a:endParaRPr sz="2000">
+            <a:endParaRPr sz="2000" dirty="0">
               <a:latin typeface="Courier New"/>
               <a:cs typeface="Courier New"/>
             </a:endParaRPr>
@@ -26419,7 +26439,7 @@
               </a:rPr>
               <a:t>statement/step</a:t>
             </a:r>
-            <a:endParaRPr sz="2000">
+            <a:endParaRPr sz="2000" dirty="0">
               <a:latin typeface="Courier New"/>
               <a:cs typeface="Courier New"/>
             </a:endParaRPr>
@@ -26463,7 +26483,7 @@
               </a:rPr>
               <a:t>...</a:t>
             </a:r>
-            <a:endParaRPr sz="2000">
+            <a:endParaRPr sz="2000" dirty="0">
               <a:latin typeface="Courier New"/>
               <a:cs typeface="Courier New"/>
             </a:endParaRPr>
@@ -26527,7 +26547,7 @@
               </a:rPr>
               <a:t>statement</a:t>
             </a:r>
-            <a:endParaRPr sz="2000">
+            <a:endParaRPr sz="2000" dirty="0">
               <a:latin typeface="Courier New"/>
               <a:cs typeface="Courier New"/>
             </a:endParaRPr>
@@ -26551,7 +26571,7 @@
               </a:rPr>
               <a:t>}</a:t>
             </a:r>
-            <a:endParaRPr sz="2000">
+            <a:endParaRPr sz="2000" dirty="0">
               <a:latin typeface="Courier New"/>
               <a:cs typeface="Courier New"/>
             </a:endParaRPr>
